--- a/Orelu-CA-Firms-Plan.pptx
+++ b/Orelu-CA-Firms-Plan.pptx
@@ -6646,7 +6646,7 @@
                           <a:ea typeface="Arial" pitchFamily="34" charset="-122"/>
                           <a:cs typeface="Arial" pitchFamily="34" charset="-120"/>
                         </a:rPr>
-                        <a:t>₹3,799</a:t>
+                        <a:t>₹3,499</a:t>
                       </a:r>
                     </a:p>
                   </a:txBody>
@@ -6687,7 +6687,7 @@
                           <a:ea typeface="Arial" pitchFamily="34" charset="-122"/>
                           <a:cs typeface="Arial" pitchFamily="34" charset="-120"/>
                         </a:rPr>
-                        <a:t>₹7,649</a:t>
+                        <a:t>₹7,499</a:t>
                       </a:r>
                     </a:p>
                   </a:txBody>
@@ -6728,7 +6728,7 @@
                           <a:ea typeface="Arial" pitchFamily="34" charset="-122"/>
                           <a:cs typeface="Arial" pitchFamily="34" charset="-120"/>
                         </a:rPr>
-                        <a:t>₹15,299</a:t>
+                        <a:t>₹15,499</a:t>
                       </a:r>
                     </a:p>
                   </a:txBody>
@@ -6894,7 +6894,7 @@
                           <a:ea typeface="Arial" pitchFamily="34" charset="-122"/>
                           <a:cs typeface="Arial" pitchFamily="34" charset="-120"/>
                         </a:rPr>
-                        <a:t>₹41,799</a:t>
+                        <a:t>₹38,499</a:t>
                       </a:r>
                     </a:p>
                   </a:txBody>
@@ -6935,7 +6935,7 @@
                           <a:ea typeface="Arial" pitchFamily="34" charset="-122"/>
                           <a:cs typeface="Arial" pitchFamily="34" charset="-120"/>
                         </a:rPr>
-                        <a:t>₹84,149</a:t>
+                        <a:t>₹82,499</a:t>
                       </a:r>
                     </a:p>
                   </a:txBody>
@@ -6976,7 +6976,7 @@
                           <a:ea typeface="Arial" pitchFamily="34" charset="-122"/>
                           <a:cs typeface="Arial" pitchFamily="34" charset="-120"/>
                         </a:rPr>
-                        <a:t>₹1,68,299</a:t>
+                        <a:t>₹1,70,499</a:t>
                       </a:r>
                     </a:p>
                   </a:txBody>
